--- a/Infosys_FinOps_GCP_Platform.pptx
+++ b/Infosys_FinOps_GCP_Platform.pptx
@@ -159,9 +159,9 @@
           </c:spPr>
           <c:cat>
             <c:strRef>
-              <c:f>Sheet1!$A$2:$A$4</c:f>
+              <c:f>Sheet1!$A$2:$A$5</c:f>
               <c:strCache>
-                <c:ptCount val="3"/>
+                <c:ptCount val="4"/>
                 <c:pt idx="0">
                   <c:v>AWS</c:v>
                 </c:pt>
@@ -171,23 +171,29 @@
                 <c:pt idx="2">
                   <c:v>GCP</c:v>
                 </c:pt>
+                <c:pt idx="3">
+                  <c:v>OCI</c:v>
+                </c:pt>
               </c:strCache>
             </c:strRef>
           </c:cat>
           <c:val>
             <c:numRef>
-              <c:f>Sheet1!$B$2:$B$4</c:f>
+              <c:f>Sheet1!$B$2:$B$5</c:f>
               <c:numCache>
                 <c:formatCode>General</c:formatCode>
-                <c:ptCount val="3"/>
+                <c:ptCount val="4"/>
                 <c:pt idx="0">
-                  <c:v>16878792.00068</c:v>
+                  <c:v>15712148.35108</c:v>
                 </c:pt>
                 <c:pt idx="1">
-                  <c:v>8225651.24992</c:v>
+                  <c:v>7761360.19392</c:v>
                 </c:pt>
                 <c:pt idx="2">
-                  <c:v>5179213.32652</c:v>
+                  <c:v>4671985.05634</c:v>
+                </c:pt>
+                <c:pt idx="3">
+                  <c:v>4501132.66764</c:v>
                 </c:pt>
               </c:numCache>
             </c:numRef>
@@ -393,76 +399,76 @@
                 <c:formatCode>General</c:formatCode>
                 <c:ptCount val="24"/>
                 <c:pt idx="0">
-                  <c:v>1612955.0732971015</c:v>
+                  <c:v>1711879.993947464</c:v>
                 </c:pt>
                 <c:pt idx="1">
-                  <c:v>1641045.957237136</c:v>
+                  <c:v>1740008.3058999944</c:v>
                 </c:pt>
                 <c:pt idx="2">
-                  <c:v>1669136.8411771709</c:v>
+                  <c:v>1768136.6178525249</c:v>
                 </c:pt>
                 <c:pt idx="3">
-                  <c:v>1697227.7251172056</c:v>
+                  <c:v>1796264.9298050555</c:v>
                 </c:pt>
                 <c:pt idx="4">
-                  <c:v>1725318.6090572404</c:v>
+                  <c:v>1824393.241757586</c:v>
                 </c:pt>
                 <c:pt idx="5">
-                  <c:v>1753409.4929972752</c:v>
+                  <c:v>1852521.5537101163</c:v>
                 </c:pt>
                 <c:pt idx="6">
-                  <c:v>1781500.3769373097</c:v>
+                  <c:v>1880649.865662647</c:v>
                 </c:pt>
                 <c:pt idx="7">
-                  <c:v>1809591.2608773448</c:v>
+                  <c:v>1908778.1776151774</c:v>
                 </c:pt>
                 <c:pt idx="8">
-                  <c:v>1837682.1448173793</c:v>
+                  <c:v>1936906.4895677078</c:v>
                 </c:pt>
                 <c:pt idx="9">
-                  <c:v>1865773.0287574143</c:v>
+                  <c:v>1965034.8015202382</c:v>
                 </c:pt>
                 <c:pt idx="10">
-                  <c:v>1893863.9126974489</c:v>
+                  <c:v>1993163.1134727686</c:v>
                 </c:pt>
                 <c:pt idx="11">
-                  <c:v>1921954.7966374836</c:v>
+                  <c:v>2021291.425425299</c:v>
                 </c:pt>
                 <c:pt idx="12">
-                  <c:v>1950045.6805775184</c:v>
+                  <c:v>2049419.7373778294</c:v>
                 </c:pt>
                 <c:pt idx="13">
-                  <c:v>1978136.5645175532</c:v>
+                  <c:v>2077548.0493303598</c:v>
                 </c:pt>
                 <c:pt idx="14">
-                  <c:v>2006227.448457588</c:v>
+                  <c:v>2105676.36128289</c:v>
                 </c:pt>
                 <c:pt idx="15">
-                  <c:v>2034318.3323976228</c:v>
+                  <c:v>2133804.6732354206</c:v>
                 </c:pt>
                 <c:pt idx="16">
-                  <c:v>2062409.2163376575</c:v>
+                  <c:v>2161932.985187951</c:v>
                 </c:pt>
                 <c:pt idx="17">
-                  <c:v>2090500.1002776923</c:v>
+                  <c:v>2190061.2971404814</c:v>
                 </c:pt>
                 <c:pt idx="18">
-                  <c:v>2118590.9842177266</c:v>
+                  <c:v>2218189.609093012</c:v>
                 </c:pt>
                 <c:pt idx="19">
-                  <c:v>2146681.8681577616</c:v>
+                  <c:v>2246317.921045542</c:v>
                 </c:pt>
                 <c:pt idx="20">
-                  <c:v>2174772.7520977966</c:v>
+                  <c:v>2274446.232998073</c:v>
                 </c:pt>
                 <c:pt idx="21">
-                  <c:v>2202863.636037831</c:v>
+                  <c:v>2302574.5449506035</c:v>
                 </c:pt>
                 <c:pt idx="22">
-                  <c:v>2230954.5199778657</c:v>
+                  <c:v>2330702.856903134</c:v>
                 </c:pt>
                 <c:pt idx="23">
-                  <c:v>2259045.4039179008</c:v>
+                  <c:v>2358831.1688556643</c:v>
                 </c:pt>
               </c:numCache>
             </c:numRef>
@@ -583,76 +589,76 @@
                 <c:formatCode>General</c:formatCode>
                 <c:ptCount val="24"/>
                 <c:pt idx="0">
-                  <c:v>1470786.8774910842</c:v>
+                  <c:v>1559562.304942423</c:v>
                 </c:pt>
                 <c:pt idx="1">
-                  <c:v>1439989.7665901526</c:v>
+                  <c:v>1524598.5643197382</c:v>
                 </c:pt>
                 <c:pt idx="2">
-                  <c:v>1422894.3028207482</c:v>
+                  <c:v>1504314.6416043185</c:v>
                 </c:pt>
                 <c:pt idx="3">
-                  <c:v>1412891.333505171</c:v>
+                  <c:v>1491629.5517949737</c:v>
                 </c:pt>
                 <c:pt idx="4">
-                  <c:v>1407420.8589964851</c:v>
+                  <c:v>1483800.534966642</c:v>
                 </c:pt>
                 <c:pt idx="5">
-                  <c:v>1405169.9556204453</c:v>
+                  <c:v>1479420.9368478304</c:v>
                 </c:pt>
                 <c:pt idx="6">
-                  <c:v>1405358.686491852</c:v>
+                  <c:v>1477655.1402792314</c:v>
                 </c:pt>
                 <c:pt idx="7">
-                  <c:v>1407478.8795833776</c:v>
+                  <c:v>1477958.6944546648</c:v>
                 </c:pt>
                 <c:pt idx="8">
-                  <c:v>1411177.5573993272</c:v>
+                  <c:v>1479953.422552585</c:v>
                 </c:pt>
                 <c:pt idx="9">
-                  <c:v>1416197.7191736018</c:v>
+                  <c:v>1483363.9763311225</c:v>
                 </c:pt>
                 <c:pt idx="10">
-                  <c:v>1422345.3500871111</c:v>
+                  <c:v>1487982.4901090057</c:v>
                 </c:pt>
                 <c:pt idx="11">
-                  <c:v>1429469.7199246383</c:v>
+                  <c:v>1493647.4729288863</c:v>
                 </c:pt>
                 <c:pt idx="12">
-                  <c:v>1437450.9608587183</c:v>
+                  <c:v>1500230.4995099767</c:v>
                 </c:pt>
                 <c:pt idx="13">
-                  <c:v>1446191.8845156443</c:v>
+                  <c:v>1507627.4431283125</c:v>
                 </c:pt>
                 <c:pt idx="14">
-                  <c:v>1455612.3937405276</c:v>
+                  <c:v>1515752.488433566</c:v>
                 </c:pt>
                 <c:pt idx="15">
-                  <c:v>1465645.5491735532</c:v>
+                  <c:v>1524533.917215257</c:v>
                 </c:pt>
                 <c:pt idx="16">
-                  <c:v>1476234.7284259542</c:v>
+                  <c:v>1533911.0647701854</c:v>
                 </c:pt>
                 <c:pt idx="17">
-                  <c:v>1487331.5283367417</c:v>
+                  <c:v>1543832.072399713</c:v>
                 </c:pt>
                 <c:pt idx="18">
-                  <c:v>1498894.1857137938</c:v>
+                  <c:v>1554252.195406382</c:v>
                 </c:pt>
                 <c:pt idx="19">
-                  <c:v>1510886.368036251</c:v>
+                  <c:v>1565132.5074636545</c:v>
                 </c:pt>
                 <c:pt idx="20">
-                  <c:v>1523276.2334014187</c:v>
+                  <c:v>1576438.89345173</c:v>
                 </c:pt>
                 <c:pt idx="21">
-                  <c:v>1536035.6898836242</c:v>
+                  <c:v>1588141.2559414753</c:v>
                 </c:pt>
                 <c:pt idx="22">
-                  <c:v>1549139.8049188724</c:v>
+                  <c:v>1600212.8824146155</c:v>
                 </c:pt>
                 <c:pt idx="23">
-                  <c:v>1562566.329164241</c:v>
+                  <c:v>1612629.9351310926</c:v>
                 </c:pt>
               </c:numCache>
             </c:numRef>
@@ -773,76 +779,76 @@
                 <c:formatCode>General</c:formatCode>
                 <c:ptCount val="24"/>
                 <c:pt idx="0">
-                  <c:v>1755123.269103119</c:v>
+                  <c:v>1864197.682952505</c:v>
                 </c:pt>
                 <c:pt idx="1">
-                  <c:v>1842102.1478841195</c:v>
+                  <c:v>1955418.0474802507</c:v>
                 </c:pt>
                 <c:pt idx="2">
-                  <c:v>1915379.3795335935</c:v>
+                  <c:v>2031958.5941007312</c:v>
                 </c:pt>
                 <c:pt idx="3">
-                  <c:v>1981564.1167292404</c:v>
+                  <c:v>2100900.3078151373</c:v>
                 </c:pt>
                 <c:pt idx="4">
-                  <c:v>2043216.3591179957</c:v>
+                  <c:v>2164985.9485485298</c:v>
                 </c:pt>
                 <c:pt idx="5">
-                  <c:v>2101649.030374105</c:v>
+                  <c:v>2225622.170572402</c:v>
                 </c:pt>
                 <c:pt idx="6">
-                  <c:v>2157642.067382768</c:v>
+                  <c:v>2283644.5910460628</c:v>
                 </c:pt>
                 <c:pt idx="7">
-                  <c:v>2211703.6421713117</c:v>
+                  <c:v>2339597.66077569</c:v>
                 </c:pt>
                 <c:pt idx="8">
-                  <c:v>2264186.7322354317</c:v>
+                  <c:v>2393859.5565828304</c:v>
                 </c:pt>
                 <c:pt idx="9">
-                  <c:v>2315348.338341227</c:v>
+                  <c:v>2446705.626709354</c:v>
                 </c:pt>
                 <c:pt idx="10">
-                  <c:v>2365382.475307787</c:v>
+                  <c:v>2498343.7368365317</c:v>
                 </c:pt>
                 <c:pt idx="11">
-                  <c:v>2414439.8733503288</c:v>
+                  <c:v>2548935.3779217117</c:v>
                 </c:pt>
                 <c:pt idx="12">
-                  <c:v>2462640.4002963183</c:v>
+                  <c:v>2598608.975245682</c:v>
                 </c:pt>
                 <c:pt idx="13">
-                  <c:v>2510081.244519462</c:v>
+                  <c:v>2647468.655532407</c:v>
                 </c:pt>
                 <c:pt idx="14">
-                  <c:v>2556842.5031746486</c:v>
+                  <c:v>2695600.2341322144</c:v>
                 </c:pt>
                 <c:pt idx="15">
-                  <c:v>2602991.1156216925</c:v>
+                  <c:v>2743075.4292555843</c:v>
                 </c:pt>
                 <c:pt idx="16">
-                  <c:v>2648583.7042493606</c:v>
+                  <c:v>2789954.9056057166</c:v>
                 </c:pt>
                 <c:pt idx="17">
-                  <c:v>2693668.672218643</c:v>
+                  <c:v>2836290.5218812497</c:v>
                 </c:pt>
                 <c:pt idx="18">
-                  <c:v>2738287.782721659</c:v>
+                  <c:v>2882127.0227796417</c:v>
                 </c:pt>
                 <c:pt idx="19">
-                  <c:v>2782477.368279272</c:v>
+                  <c:v>2927503.33462743</c:v>
                 </c:pt>
                 <c:pt idx="20">
-                  <c:v>2826269.2707941746</c:v>
+                  <c:v>2972453.5725444164</c:v>
                 </c:pt>
                 <c:pt idx="21">
-                  <c:v>2869691.582192038</c:v>
+                  <c:v>3017007.8339597317</c:v>
                 </c:pt>
                 <c:pt idx="22">
-                  <c:v>2912769.2350368593</c:v>
+                  <c:v>3061192.831391652</c:v>
                 </c:pt>
                 <c:pt idx="23">
-                  <c:v>2955524.4786715605</c:v>
+                  <c:v>3105032.402580236</c:v>
                 </c:pt>
               </c:numCache>
             </c:numRef>
@@ -1010,13 +1016,13 @@
                 <c:formatCode>General</c:formatCode>
                 <c:ptCount val="3"/>
                 <c:pt idx="0">
-                  <c:v>3419984.6399999997</c:v>
+                  <c:v>3814495.3200000003</c:v>
                 </c:pt>
                 <c:pt idx="1">
-                  <c:v>1316361.72</c:v>
+                  <c:v>1494944.52</c:v>
                 </c:pt>
                 <c:pt idx="2">
-                  <c:v>209957.28</c:v>
+                  <c:v>215185.68</c:v>
                 </c:pt>
               </c:numCache>
             </c:numRef>
@@ -4236,7 +4242,7 @@
                 </a:solidFill>
                 <a:latin typeface="Segoe UI"/>
               </a:rPr>
-              <a:t>AWS, Azure and GCP spend in one FOCUS warehouse, with an agentic control plane</a:t>
+              <a:t>AWS, Azure, GCP and OCI spend in one FOCUS warehouse, with an agentic control plane</a:t>
             </a:r>
           </a:p>
         </p:txBody>
@@ -4346,7 +4352,7 @@
                 </a:solidFill>
                 <a:latin typeface="Segoe UI"/>
               </a:rPr>
-              <a:t>—  53 optimization levers detected from the bill; $4.95M identified on a representative estate</a:t>
+              <a:t>—  59 optimization levers detected from the bill; $5.52M identified on a representative estate</a:t>
             </a:r>
           </a:p>
           <a:p>
@@ -4591,7 +4597,7 @@
                 </a:solidFill>
                 <a:latin typeface="Segoe UI"/>
               </a:rPr>
-              <a:t>Amortised spend across AWS, Azure and GCP · 24 months of history</a:t>
+              <a:t>Amortised spend across AWS, Azure, GCP and OCI · 24 months of history</a:t>
             </a:r>
           </a:p>
         </p:txBody>
@@ -4803,7 +4809,7 @@
                 </a:solidFill>
                 <a:latin typeface="Segoe UI"/>
               </a:rPr>
-              <a:t>$30.28M</a:t>
+              <a:t>$32.65M</a:t>
             </a:r>
           </a:p>
         </p:txBody>
@@ -5217,7 +5223,7 @@
                 </a:solidFill>
                 <a:latin typeface="Segoe UI"/>
               </a:rPr>
-              <a:t>44.1%</a:t>
+              <a:t>42.0%</a:t>
             </a:r>
           </a:p>
         </p:txBody>
@@ -5463,7 +5469,7 @@
                 </a:solidFill>
                 <a:latin typeface="Segoe UI"/>
               </a:rPr>
-              <a:t>$327K unused</a:t>
+              <a:t>$346K unused</a:t>
             </a:r>
           </a:p>
         </p:txBody>
@@ -5631,7 +5637,7 @@
                 </a:solidFill>
                 <a:latin typeface="Segoe UI"/>
               </a:rPr>
-              <a:t>$2.26M</a:t>
+              <a:t>$2.52M</a:t>
             </a:r>
           </a:p>
         </p:txBody>
@@ -5670,7 +5676,7 @@
                 </a:solidFill>
                 <a:latin typeface="Segoe UI"/>
               </a:rPr>
-              <a:t>7.5% of spend</a:t>
+              <a:t>7.7% of spend</a:t>
             </a:r>
           </a:p>
         </p:txBody>
@@ -5838,7 +5844,7 @@
                 </a:solidFill>
                 <a:latin typeface="Segoe UI"/>
               </a:rPr>
-              <a:t>85.9%</a:t>
+              <a:t>82.6%</a:t>
             </a:r>
           </a:p>
         </p:txBody>
@@ -5934,7 +5940,7 @@
                 </a:solidFill>
                 <a:latin typeface="Segoe UI"/>
               </a:rPr>
-              <a:t>Effective Savings Rate is the outcome metric, not coverage. 100% coverage at 60% utilisation is still a bad deal, and only ESR shows that. Foundation benchmarks: median ~0%, 75th percentile ~23%, 98th ~46%. This estate sits at 21.6%, with $327K of commitment already burned unused.</a:t>
+              <a:t>Effective Savings Rate is the outcome metric, not coverage. 100% coverage at 60% utilisation is still a bad deal, and only ESR shows that. Foundation benchmarks: median ~0%, 75th percentile ~23%, 98th ~46%. This estate sits at 21.6%, with $346K of commitment already burned unused.</a:t>
             </a:r>
           </a:p>
         </p:txBody>
@@ -6147,7 +6153,7 @@
                 </a:solidFill>
                 <a:latin typeface="Segoe UI"/>
               </a:rPr>
-              <a:t>Method chosen by rolling-origin backtest: Linear · WAPE 4.83% (Best-in-class)</a:t>
+              <a:t>Method chosen by rolling-origin backtest: Linear · WAPE 4.74% (Best-in-class)</a:t>
             </a:r>
           </a:p>
         </p:txBody>
@@ -6377,7 +6383,7 @@
                 </a:solidFill>
                 <a:latin typeface="Segoe UI"/>
               </a:rPr>
-              <a:t>$46.46M</a:t>
+              <a:t>$48.85M</a:t>
             </a:r>
           </a:p>
         </p:txBody>
@@ -6584,7 +6590,7 @@
                 </a:solidFill>
                 <a:latin typeface="Segoe UI"/>
               </a:rPr>
-              <a:t>$51.16M</a:t>
+              <a:t>$53.79M</a:t>
             </a:r>
           </a:p>
         </p:txBody>
@@ -6662,7 +6668,7 @@
                 </a:solidFill>
                 <a:latin typeface="Segoe UI"/>
               </a:rPr>
-              <a:t>When an RI, Savings Plan or CUD term ends, the rate snaps back to on-demand. The overlay adds $4.70M that the trend line never sees. This is the single most important thing naive cloud forecasting misses.</a:t>
+              <a:t>When an RI, Savings Plan or CUD term ends, the rate snaps back to on-demand. The overlay adds $4.94M that the trend line never sees. This is the single most important thing naive cloud forecasting misses.</a:t>
             </a:r>
           </a:p>
         </p:txBody>
@@ -6875,7 +6881,7 @@
                 </a:solidFill>
                 <a:latin typeface="Segoe UI"/>
               </a:rPr>
-              <a:t>$4.95M identified, across 30 opportunities</a:t>
+              <a:t>$5.52M identified, across 36 opportunities</a:t>
             </a:r>
           </a:p>
         </p:txBody>
@@ -7410,7 +7416,7 @@
                 </a:solidFill>
                 <a:latin typeface="Segoe UI"/>
               </a:rPr>
-              <a:t>$1.33M</a:t>
+              <a:t>$1.19M</a:t>
             </a:r>
           </a:p>
         </p:txBody>
@@ -7605,7 +7611,7 @@
                 </a:solidFill>
                 <a:latin typeface="Segoe UI"/>
               </a:rPr>
-              <a:t>$745K</a:t>
+              <a:t>$787K</a:t>
             </a:r>
           </a:p>
         </p:txBody>
@@ -7800,7 +7806,7 @@
                 </a:solidFill>
                 <a:latin typeface="Segoe UI"/>
               </a:rPr>
-              <a:t>$738K</a:t>
+              <a:t>$745K</a:t>
             </a:r>
           </a:p>
         </p:txBody>
@@ -7995,7 +8001,7 @@
                 </a:solidFill>
                 <a:latin typeface="Segoe UI"/>
               </a:rPr>
-              <a:t>$442K</a:t>
+              <a:t>$462K</a:t>
             </a:r>
           </a:p>
         </p:txBody>
@@ -8073,7 +8079,7 @@
                 </a:solidFill>
                 <a:latin typeface="Segoe UI"/>
               </a:rPr>
-              <a:t>R9</a:t>
+              <a:t>R17</a:t>
             </a:r>
           </a:p>
         </p:txBody>
@@ -8112,7 +8118,7 @@
                 </a:solidFill>
                 <a:latin typeface="Segoe UI"/>
               </a:rPr>
-              <a:t>Spot / Preemptible / Azure Spot</a:t>
+              <a:t>OCI Annual Universal Credits</a:t>
             </a:r>
           </a:p>
         </p:txBody>
@@ -8151,7 +8157,7 @@
                 </a:solidFill>
                 <a:latin typeface="Segoe UI"/>
               </a:rPr>
-              <a:t>AWS</a:t>
+              <a:t>OCI</a:t>
             </a:r>
           </a:p>
         </p:txBody>
@@ -8190,7 +8196,7 @@
                 </a:solidFill>
                 <a:latin typeface="Segoe UI"/>
               </a:rPr>
-              <a:t>$171K</a:t>
+              <a:t>$340K</a:t>
             </a:r>
           </a:p>
         </p:txBody>
@@ -8229,7 +8235,7 @@
                 </a:solidFill>
                 <a:latin typeface="Segoe UI"/>
               </a:rPr>
-              <a:t>Medium/High</a:t>
+              <a:t>Low/Low</a:t>
             </a:r>
           </a:p>
         </p:txBody>
@@ -8268,7 +8274,7 @@
                 </a:solidFill>
                 <a:latin typeface="Segoe UI"/>
               </a:rPr>
-              <a:t>R12</a:t>
+              <a:t>U17</a:t>
             </a:r>
           </a:p>
         </p:txBody>
@@ -8307,7 +8313,7 @@
                 </a:solidFill>
                 <a:latin typeface="Segoe UI"/>
               </a:rPr>
-              <a:t>BYOL / licence mobility</a:t>
+              <a:t>Previous-generation instance fam</a:t>
             </a:r>
           </a:p>
         </p:txBody>
@@ -8346,7 +8352,7 @@
                 </a:solidFill>
                 <a:latin typeface="Segoe UI"/>
               </a:rPr>
-              <a:t>AWS</a:t>
+              <a:t>AWS, Azure, GC</a:t>
             </a:r>
           </a:p>
         </p:txBody>
@@ -8385,7 +8391,7 @@
                 </a:solidFill>
                 <a:latin typeface="Segoe UI"/>
               </a:rPr>
-              <a:t>$168K</a:t>
+              <a:t>$179K</a:t>
             </a:r>
           </a:p>
         </p:txBody>
@@ -8424,7 +8430,7 @@
                 </a:solidFill>
                 <a:latin typeface="Segoe UI"/>
               </a:rPr>
-              <a:t>Medium/Medium</a:t>
+              <a:t>Low/Low</a:t>
             </a:r>
           </a:p>
         </p:txBody>
@@ -8463,7 +8469,7 @@
                 </a:solidFill>
                 <a:latin typeface="Segoe UI"/>
               </a:rPr>
-              <a:t>U17</a:t>
+              <a:t>R9</a:t>
             </a:r>
           </a:p>
         </p:txBody>
@@ -8502,7 +8508,7 @@
                 </a:solidFill>
                 <a:latin typeface="Segoe UI"/>
               </a:rPr>
-              <a:t>Previous-generation instance fam</a:t>
+              <a:t>Spot / Preemptible / Azure Spot</a:t>
             </a:r>
           </a:p>
         </p:txBody>
@@ -8541,7 +8547,7 @@
                 </a:solidFill>
                 <a:latin typeface="Segoe UI"/>
               </a:rPr>
-              <a:t>AWS, Azure, GC</a:t>
+              <a:t>AWS</a:t>
             </a:r>
           </a:p>
         </p:txBody>
@@ -8580,7 +8586,7 @@
                 </a:solidFill>
                 <a:latin typeface="Segoe UI"/>
               </a:rPr>
-              <a:t>$151K</a:t>
+              <a:t>$152K</a:t>
             </a:r>
           </a:p>
         </p:txBody>
@@ -8619,7 +8625,7 @@
                 </a:solidFill>
                 <a:latin typeface="Segoe UI"/>
               </a:rPr>
-              <a:t>Low/Low</a:t>
+              <a:t>Medium/High</a:t>
             </a:r>
           </a:p>
         </p:txBody>
@@ -8658,7 +8664,7 @@
                 </a:solidFill>
                 <a:latin typeface="Segoe UI"/>
               </a:rPr>
-              <a:t>U4</a:t>
+              <a:t>R12</a:t>
             </a:r>
           </a:p>
         </p:txBody>
@@ -8697,7 +8703,7 @@
                 </a:solidFill>
                 <a:latin typeface="Segoe UI"/>
               </a:rPr>
-              <a:t>Unattached EBS / managed disks</a:t>
+              <a:t>BYOL / licence mobility</a:t>
             </a:r>
           </a:p>
         </p:txBody>
@@ -8736,7 +8742,7 @@
                 </a:solidFill>
                 <a:latin typeface="Segoe UI"/>
               </a:rPr>
-              <a:t>AWS, Azure, GC</a:t>
+              <a:t>AWS</a:t>
             </a:r>
           </a:p>
         </p:txBody>
@@ -8775,7 +8781,7 @@
                 </a:solidFill>
                 <a:latin typeface="Segoe UI"/>
               </a:rPr>
-              <a:t>$111K</a:t>
+              <a:t>$151K</a:t>
             </a:r>
           </a:p>
         </p:txBody>
@@ -8814,7 +8820,7 @@
                 </a:solidFill>
                 <a:latin typeface="Segoe UI"/>
               </a:rPr>
-              <a:t>Low/Low</a:t>
+              <a:t>Medium/Medium</a:t>
             </a:r>
           </a:p>
         </p:txBody>
@@ -8853,7 +8859,7 @@
                 </a:solidFill>
                 <a:latin typeface="Segoe UI"/>
               </a:rPr>
-              <a:t>Executing the rate levers alone would move Effective Savings Rate from 21.6% to 39.6% (+17.9 points). Savings percentages in the catalog are vendor 'up-to' figures — ceilings, not guarantees. Where a detector cannot see what it needs (access patterns, CPU utilisation) it lowers its confidence and says so.</a:t>
+              <a:t>Executing the rate levers alone would move Effective Savings Rate from 21.6% to 40.2% (+18.6 points). Savings percentages in the catalog are vendor 'up-to' figures — ceilings, not guarantees. Where a detector cannot see what it needs (access patterns, CPU utilisation) it lowers its confidence and says so.</a:t>
             </a:r>
           </a:p>
         </p:txBody>
@@ -9505,7 +9511,7 @@
                 </a:solidFill>
                 <a:latin typeface="Segoe UI"/>
               </a:rPr>
-              <a:t>$23K</a:t>
+              <a:t>$27K</a:t>
             </a:r>
           </a:p>
         </p:txBody>
@@ -9544,7 +9550,7 @@
                 </a:solidFill>
                 <a:latin typeface="Segoe UI"/>
               </a:rPr>
-              <a:t>$4K</a:t>
+              <a:t>$5K</a:t>
             </a:r>
           </a:p>
         </p:txBody>
@@ -9583,7 +9589,7 @@
                 </a:solidFill>
                 <a:latin typeface="Segoe UI"/>
               </a:rPr>
-              <a:t>+426%</a:t>
+              <a:t>+489%</a:t>
             </a:r>
           </a:p>
         </p:txBody>
@@ -9739,7 +9745,7 @@
                 </a:solidFill>
                 <a:latin typeface="Segoe UI"/>
               </a:rPr>
-              <a:t>$11K</a:t>
+              <a:t>$10K</a:t>
             </a:r>
           </a:p>
         </p:txBody>
@@ -9817,7 +9823,7 @@
                 </a:solidFill>
                 <a:latin typeface="Segoe UI"/>
               </a:rPr>
-              <a:t>+384%</a:t>
+              <a:t>+388%</a:t>
             </a:r>
           </a:p>
         </p:txBody>
@@ -9973,7 +9979,7 @@
                 </a:solidFill>
                 <a:latin typeface="Segoe UI"/>
               </a:rPr>
-              <a:t>$263</a:t>
+              <a:t>$257</a:t>
             </a:r>
           </a:p>
         </p:txBody>
@@ -10012,7 +10018,7 @@
                 </a:solidFill>
                 <a:latin typeface="Segoe UI"/>
               </a:rPr>
-              <a:t>$159</a:t>
+              <a:t>$158</a:t>
             </a:r>
           </a:p>
         </p:txBody>
@@ -10051,7 +10057,7 @@
                 </a:solidFill>
                 <a:latin typeface="Segoe UI"/>
               </a:rPr>
-              <a:t>+65%</a:t>
+              <a:t>+63%</a:t>
             </a:r>
           </a:p>
         </p:txBody>
@@ -10258,7 +10264,7 @@
                 </a:solidFill>
                 <a:latin typeface="Segoe UI"/>
               </a:rPr>
-              <a:t>29</a:t>
+              <a:t>23</a:t>
             </a:r>
           </a:p>
         </p:txBody>
@@ -10788,7 +10794,7 @@
                 </a:solidFill>
                 <a:latin typeface="Segoe UI"/>
               </a:rPr>
-              <a:t>AWS and Azure are reached through Workload Identity Federation. The GCP service account assumes a read-only role. Nothing to rotate, nothing to leak.</a:t>
+              <a:t>AWS and Azure are reached through Workload Identity Federation — nothing to rotate there. OCI is the exception: its SDK signs with an RSA key, so that one key lives in Secret Manager and does need rotation.</a:t>
             </a:r>
           </a:p>
         </p:txBody>
@@ -13317,7 +13323,7 @@
                 </a:solidFill>
                 <a:latin typeface="Segoe UI"/>
               </a:rPr>
-              <a:t>0.301%</a:t>
+              <a:t>0.279%</a:t>
             </a:r>
           </a:p>
         </p:txBody>
@@ -13356,7 +13362,7 @@
                 </a:solidFill>
                 <a:latin typeface="Segoe UI"/>
               </a:rPr>
-              <a:t>of $30.28M under management</a:t>
+              <a:t>of $32.65M under management</a:t>
             </a:r>
           </a:p>
         </p:txBody>
@@ -13859,7 +13865,7 @@
                 </a:solidFill>
                 <a:latin typeface="Segoe UI"/>
               </a:rPr>
-              <a:t>—  GCP project, Workload Identity Federation to AWS and Azure</a:t>
+              <a:t>—  GCP project, Workload Identity Federation to AWS and Azure, an API signing key for OCI</a:t>
             </a:r>
           </a:p>
           <a:p>
@@ -15282,7 +15288,7 @@
                 </a:solidFill>
                 <a:latin typeface="Segoe UI"/>
               </a:rPr>
-              <a:t>Not per account. AWS and Azure via Workload Identity Federation; GCP needs only the billing export enabled.</a:t>
+              <a:t>Not per account. AWS and Azure via Workload Identity Federation; GCP needs only the billing export enabled; OCI needs one API key plus an 'endorse' policy into Oracle's report tenancy.</a:t>
             </a:r>
           </a:p>
         </p:txBody>
@@ -15975,7 +15981,7 @@
                 </a:solidFill>
                 <a:latin typeface="Segoe UI"/>
               </a:rPr>
-              <a:t>AWS, Azure and GCP each bill in their own shape. Reconciling them by hand is a monthly project, not a dashboard.</a:t>
+              <a:t>AWS, Azure, GCP and OCI each bill in their own shape. Reconciling them by hand is a monthly project, not a dashboard.</a:t>
             </a:r>
           </a:p>
         </p:txBody>
@@ -16857,7 +16863,7 @@
         <p:spPr>
           <a:xfrm>
             <a:off x="640080" y="2011680"/>
-            <a:ext cx="3502152" cy="1371600"/>
+            <a:ext cx="2587752" cy="1371600"/>
           </a:xfrm>
           <a:prstGeom prst="roundRect">
             <a:avLst>
@@ -16903,7 +16909,7 @@
         <p:spPr>
           <a:xfrm>
             <a:off x="640080" y="2011680"/>
-            <a:ext cx="3502152" cy="50800"/>
+            <a:ext cx="2587752" cy="50800"/>
           </a:xfrm>
           <a:prstGeom prst="rect">
             <a:avLst/>
@@ -16946,27 +16952,27 @@
         </p:nvSpPr>
         <p:spPr>
           <a:xfrm>
-            <a:off x="868680" y="2194560"/>
-            <a:ext cx="3108960" cy="365760"/>
-          </a:xfrm>
-          <a:prstGeom prst="rect">
-            <a:avLst/>
-          </a:prstGeom>
-          <a:noFill/>
-        </p:spPr>
-        <p:txBody>
-          <a:bodyPr wrap="square">
-            <a:spAutoFit/>
-          </a:bodyPr>
-          <a:lstStyle/>
-          <a:p>
-            <a:pPr algn="l">
-              <a:spcAft>
-                <a:spcPts val="400"/>
-              </a:spcAft>
-            </a:pPr>
-            <a:r>
-              <a:rPr sz="1500" b="1">
+            <a:off x="822960" y="2194560"/>
+            <a:ext cx="2221992" cy="365760"/>
+          </a:xfrm>
+          <a:prstGeom prst="rect">
+            <a:avLst/>
+          </a:prstGeom>
+          <a:noFill/>
+        </p:spPr>
+        <p:txBody>
+          <a:bodyPr wrap="square">
+            <a:spAutoFit/>
+          </a:bodyPr>
+          <a:lstStyle/>
+          <a:p>
+            <a:pPr algn="l">
+              <a:spcAft>
+                <a:spcPts val="400"/>
+              </a:spcAft>
+            </a:pPr>
+            <a:r>
+              <a:rPr sz="1400" b="1">
                 <a:solidFill>
                   <a:srgbClr val="0B142A"/>
                 </a:solidFill>
@@ -16985,27 +16991,27 @@
         </p:nvSpPr>
         <p:spPr>
           <a:xfrm>
-            <a:off x="868680" y="2578608"/>
-            <a:ext cx="3108960" cy="731520"/>
-          </a:xfrm>
-          <a:prstGeom prst="rect">
-            <a:avLst/>
-          </a:prstGeom>
-          <a:noFill/>
-        </p:spPr>
-        <p:txBody>
-          <a:bodyPr wrap="square">
-            <a:spAutoFit/>
-          </a:bodyPr>
-          <a:lstStyle/>
-          <a:p>
-            <a:pPr algn="l">
-              <a:spcAft>
-                <a:spcPts val="400"/>
-              </a:spcAft>
-            </a:pPr>
-            <a:r>
-              <a:rPr sz="1050" b="0">
+            <a:off x="822960" y="2578608"/>
+            <a:ext cx="2221992" cy="731520"/>
+          </a:xfrm>
+          <a:prstGeom prst="rect">
+            <a:avLst/>
+          </a:prstGeom>
+          <a:noFill/>
+        </p:spPr>
+        <p:txBody>
+          <a:bodyPr wrap="square">
+            <a:spAutoFit/>
+          </a:bodyPr>
+          <a:lstStyle/>
+          <a:p>
+            <a:pPr algn="l">
+              <a:spcAft>
+                <a:spcPts val="400"/>
+              </a:spcAft>
+            </a:pPr>
+            <a:r>
+              <a:rPr sz="950" b="0">
                 <a:solidFill>
                   <a:srgbClr val="445066"/>
                 </a:solidFill>
@@ -17021,7 +17027,7 @@
               </a:spcAft>
             </a:pPr>
             <a:r>
-              <a:rPr sz="1050" b="0">
+              <a:rPr sz="950" b="0">
                 <a:solidFill>
                   <a:srgbClr val="445066"/>
                 </a:solidFill>
@@ -17040,8 +17046,8 @@
         </p:nvSpPr>
         <p:spPr>
           <a:xfrm>
-            <a:off x="4315967" y="2011680"/>
-            <a:ext cx="3502152" cy="1371600"/>
+            <a:off x="3410712" y="2011680"/>
+            <a:ext cx="2587752" cy="1371600"/>
           </a:xfrm>
           <a:prstGeom prst="roundRect">
             <a:avLst>
@@ -17086,8 +17092,8 @@
         </p:nvSpPr>
         <p:spPr>
           <a:xfrm>
-            <a:off x="4315967" y="2011680"/>
-            <a:ext cx="3502152" cy="50800"/>
+            <a:off x="3410712" y="2011680"/>
+            <a:ext cx="2587752" cy="50800"/>
           </a:xfrm>
           <a:prstGeom prst="rect">
             <a:avLst/>
@@ -17130,27 +17136,27 @@
         </p:nvSpPr>
         <p:spPr>
           <a:xfrm>
-            <a:off x="4544567" y="2194560"/>
-            <a:ext cx="3108960" cy="365760"/>
-          </a:xfrm>
-          <a:prstGeom prst="rect">
-            <a:avLst/>
-          </a:prstGeom>
-          <a:noFill/>
-        </p:spPr>
-        <p:txBody>
-          <a:bodyPr wrap="square">
-            <a:spAutoFit/>
-          </a:bodyPr>
-          <a:lstStyle/>
-          <a:p>
-            <a:pPr algn="l">
-              <a:spcAft>
-                <a:spcPts val="400"/>
-              </a:spcAft>
-            </a:pPr>
-            <a:r>
-              <a:rPr sz="1500" b="1">
+            <a:off x="3593592" y="2194560"/>
+            <a:ext cx="2221992" cy="365760"/>
+          </a:xfrm>
+          <a:prstGeom prst="rect">
+            <a:avLst/>
+          </a:prstGeom>
+          <a:noFill/>
+        </p:spPr>
+        <p:txBody>
+          <a:bodyPr wrap="square">
+            <a:spAutoFit/>
+          </a:bodyPr>
+          <a:lstStyle/>
+          <a:p>
+            <a:pPr algn="l">
+              <a:spcAft>
+                <a:spcPts val="400"/>
+              </a:spcAft>
+            </a:pPr>
+            <a:r>
+              <a:rPr sz="1400" b="1">
                 <a:solidFill>
                   <a:srgbClr val="0B142A"/>
                 </a:solidFill>
@@ -17169,27 +17175,27 @@
         </p:nvSpPr>
         <p:spPr>
           <a:xfrm>
-            <a:off x="4544567" y="2578608"/>
-            <a:ext cx="3108960" cy="731520"/>
-          </a:xfrm>
-          <a:prstGeom prst="rect">
-            <a:avLst/>
-          </a:prstGeom>
-          <a:noFill/>
-        </p:spPr>
-        <p:txBody>
-          <a:bodyPr wrap="square">
-            <a:spAutoFit/>
-          </a:bodyPr>
-          <a:lstStyle/>
-          <a:p>
-            <a:pPr algn="l">
-              <a:spcAft>
-                <a:spcPts val="400"/>
-              </a:spcAft>
-            </a:pPr>
-            <a:r>
-              <a:rPr sz="1050" b="0">
+            <a:off x="3593592" y="2578608"/>
+            <a:ext cx="2221992" cy="731520"/>
+          </a:xfrm>
+          <a:prstGeom prst="rect">
+            <a:avLst/>
+          </a:prstGeom>
+          <a:noFill/>
+        </p:spPr>
+        <p:txBody>
+          <a:bodyPr wrap="square">
+            <a:spAutoFit/>
+          </a:bodyPr>
+          <a:lstStyle/>
+          <a:p>
+            <a:pPr algn="l">
+              <a:spcAft>
+                <a:spcPts val="400"/>
+              </a:spcAft>
+            </a:pPr>
+            <a:r>
+              <a:rPr sz="950" b="0">
                 <a:solidFill>
                   <a:srgbClr val="445066"/>
                 </a:solidFill>
@@ -17205,7 +17211,7 @@
               </a:spcAft>
             </a:pPr>
             <a:r>
-              <a:rPr sz="1050" b="0">
+              <a:rPr sz="950" b="0">
                 <a:solidFill>
                   <a:srgbClr val="445066"/>
                 </a:solidFill>
@@ -17224,8 +17230,8 @@
         </p:nvSpPr>
         <p:spPr>
           <a:xfrm>
-            <a:off x="7991854" y="2011680"/>
-            <a:ext cx="3502152" cy="1371600"/>
+            <a:off x="6181344" y="2011680"/>
+            <a:ext cx="2587752" cy="1371600"/>
           </a:xfrm>
           <a:prstGeom prst="roundRect">
             <a:avLst>
@@ -17270,8 +17276,8 @@
         </p:nvSpPr>
         <p:spPr>
           <a:xfrm>
-            <a:off x="7991854" y="2011680"/>
-            <a:ext cx="3502152" cy="50800"/>
+            <a:off x="6181344" y="2011680"/>
+            <a:ext cx="2587752" cy="50800"/>
           </a:xfrm>
           <a:prstGeom prst="rect">
             <a:avLst/>
@@ -17314,27 +17320,27 @@
         </p:nvSpPr>
         <p:spPr>
           <a:xfrm>
-            <a:off x="8220454" y="2194560"/>
-            <a:ext cx="3108960" cy="365760"/>
-          </a:xfrm>
-          <a:prstGeom prst="rect">
-            <a:avLst/>
-          </a:prstGeom>
-          <a:noFill/>
-        </p:spPr>
-        <p:txBody>
-          <a:bodyPr wrap="square">
-            <a:spAutoFit/>
-          </a:bodyPr>
-          <a:lstStyle/>
-          <a:p>
-            <a:pPr algn="l">
-              <a:spcAft>
-                <a:spcPts val="400"/>
-              </a:spcAft>
-            </a:pPr>
-            <a:r>
-              <a:rPr sz="1500" b="1">
+            <a:off x="6364224" y="2194560"/>
+            <a:ext cx="2221992" cy="365760"/>
+          </a:xfrm>
+          <a:prstGeom prst="rect">
+            <a:avLst/>
+          </a:prstGeom>
+          <a:noFill/>
+        </p:spPr>
+        <p:txBody>
+          <a:bodyPr wrap="square">
+            <a:spAutoFit/>
+          </a:bodyPr>
+          <a:lstStyle/>
+          <a:p>
+            <a:pPr algn="l">
+              <a:spcAft>
+                <a:spcPts val="400"/>
+              </a:spcAft>
+            </a:pPr>
+            <a:r>
+              <a:rPr sz="1400" b="1">
                 <a:solidFill>
                   <a:srgbClr val="0B142A"/>
                 </a:solidFill>
@@ -17353,27 +17359,27 @@
         </p:nvSpPr>
         <p:spPr>
           <a:xfrm>
-            <a:off x="8220454" y="2578608"/>
-            <a:ext cx="3108960" cy="731520"/>
-          </a:xfrm>
-          <a:prstGeom prst="rect">
-            <a:avLst/>
-          </a:prstGeom>
-          <a:noFill/>
-        </p:spPr>
-        <p:txBody>
-          <a:bodyPr wrap="square">
-            <a:spAutoFit/>
-          </a:bodyPr>
-          <a:lstStyle/>
-          <a:p>
-            <a:pPr algn="l">
-              <a:spcAft>
-                <a:spcPts val="400"/>
-              </a:spcAft>
-            </a:pPr>
-            <a:r>
-              <a:rPr sz="1050" b="0">
+            <a:off x="6364224" y="2578608"/>
+            <a:ext cx="2221992" cy="731520"/>
+          </a:xfrm>
+          <a:prstGeom prst="rect">
+            <a:avLst/>
+          </a:prstGeom>
+          <a:noFill/>
+        </p:spPr>
+        <p:txBody>
+          <a:bodyPr wrap="square">
+            <a:spAutoFit/>
+          </a:bodyPr>
+          <a:lstStyle/>
+          <a:p>
+            <a:pPr algn="l">
+              <a:spcAft>
+                <a:spcPts val="400"/>
+              </a:spcAft>
+            </a:pPr>
+            <a:r>
+              <a:rPr sz="950" b="0">
                 <a:solidFill>
                   <a:srgbClr val="445066"/>
                 </a:solidFill>
@@ -17389,7 +17395,7 @@
               </a:spcAft>
             </a:pPr>
             <a:r>
-              <a:rPr sz="1050" b="0">
+              <a:rPr sz="950" b="0">
                 <a:solidFill>
                   <a:srgbClr val="445066"/>
                 </a:solidFill>
@@ -17402,53 +17408,14 @@
       </p:sp>
       <p:sp>
         <p:nvSpPr>
-          <p:cNvPr id="18" name="TextBox 17"/>
-          <p:cNvSpPr txBox="1"/>
-          <p:nvPr/>
-        </p:nvSpPr>
-        <p:spPr>
-          <a:xfrm>
-            <a:off x="640080" y="3657600"/>
-            <a:ext cx="10881360" cy="1280160"/>
-          </a:xfrm>
-          <a:prstGeom prst="rect">
-            <a:avLst/>
-          </a:prstGeom>
-          <a:noFill/>
-        </p:spPr>
-        <p:txBody>
-          <a:bodyPr wrap="square">
-            <a:spAutoFit/>
-          </a:bodyPr>
-          <a:lstStyle/>
-          <a:p>
-            <a:pPr algn="l">
-              <a:spcAft>
-                <a:spcPts val="400"/>
-              </a:spcAft>
-            </a:pPr>
-            <a:r>
-              <a:rPr sz="1300" b="0">
-                <a:solidFill>
-                  <a:srgbClr val="445066"/>
-                </a:solidFill>
-                <a:latin typeface="Segoe UI"/>
-              </a:rPr>
-              <a:t>All three hyperscalers emit FOCUS natively today. So do CloudZero and Vantage; Cloudability, CloudHealth and Flexera ingest it. That is why this platform is vendor-neutral by construction rather than by adapter: no dashboard, KPI formula, optimization detector or agent tool has ever seen a vendor-specific field.</a:t>
-            </a:r>
-          </a:p>
-        </p:txBody>
-      </p:sp>
-      <p:sp>
-        <p:nvSpPr>
-          <p:cNvPr id="19" name="Rounded Rectangle 18"/>
+          <p:cNvPr id="18" name="Rounded Rectangle 17"/>
           <p:cNvSpPr/>
           <p:nvPr/>
         </p:nvSpPr>
         <p:spPr>
           <a:xfrm>
-            <a:off x="640080" y="4892040"/>
-            <a:ext cx="3502152" cy="1188720"/>
+            <a:off x="8951976" y="2011680"/>
+            <a:ext cx="2587752" cy="1371600"/>
           </a:xfrm>
           <a:prstGeom prst="roundRect">
             <a:avLst>
@@ -17487,20 +17454,20 @@
       </p:sp>
       <p:sp>
         <p:nvSpPr>
-          <p:cNvPr id="20" name="Rectangle 19"/>
+          <p:cNvPr id="19" name="Rectangle 18"/>
           <p:cNvSpPr/>
           <p:nvPr/>
         </p:nvSpPr>
         <p:spPr>
           <a:xfrm>
-            <a:off x="640080" y="4892040"/>
-            <a:ext cx="44450" cy="1188720"/>
+            <a:off x="8951976" y="2011680"/>
+            <a:ext cx="2587752" cy="50800"/>
           </a:xfrm>
           <a:prstGeom prst="rect">
             <a:avLst/>
           </a:prstGeom>
           <a:solidFill>
-            <a:srgbClr val="1E6FD9"/>
+            <a:srgbClr val="6E3AA7"/>
           </a:solidFill>
           <a:ln>
             <a:noFill/>
@@ -17531,39 +17498,94 @@
       </p:sp>
       <p:sp>
         <p:nvSpPr>
+          <p:cNvPr id="20" name="TextBox 19"/>
+          <p:cNvSpPr txBox="1"/>
+          <p:nvPr/>
+        </p:nvSpPr>
+        <p:spPr>
+          <a:xfrm>
+            <a:off x="9134856" y="2194560"/>
+            <a:ext cx="2221992" cy="365760"/>
+          </a:xfrm>
+          <a:prstGeom prst="rect">
+            <a:avLst/>
+          </a:prstGeom>
+          <a:noFill/>
+        </p:spPr>
+        <p:txBody>
+          <a:bodyPr wrap="square">
+            <a:spAutoFit/>
+          </a:bodyPr>
+          <a:lstStyle/>
+          <a:p>
+            <a:pPr algn="l">
+              <a:spcAft>
+                <a:spcPts val="400"/>
+              </a:spcAft>
+            </a:pPr>
+            <a:r>
+              <a:rPr sz="1400" b="1">
+                <a:solidFill>
+                  <a:srgbClr val="0B142A"/>
+                </a:solidFill>
+                <a:latin typeface="Segoe UI"/>
+              </a:rPr>
+              <a:t>OCI</a:t>
+            </a:r>
+          </a:p>
+        </p:txBody>
+      </p:sp>
+      <p:sp>
+        <p:nvSpPr>
           <p:cNvPr id="21" name="TextBox 20"/>
           <p:cNvSpPr txBox="1"/>
           <p:nvPr/>
         </p:nvSpPr>
         <p:spPr>
           <a:xfrm>
-            <a:off x="804672" y="4965192"/>
-            <a:ext cx="3227832" cy="256032"/>
-          </a:xfrm>
-          <a:prstGeom prst="rect">
-            <a:avLst/>
-          </a:prstGeom>
-          <a:noFill/>
-        </p:spPr>
-        <p:txBody>
-          <a:bodyPr wrap="square">
-            <a:spAutoFit/>
-          </a:bodyPr>
-          <a:lstStyle/>
-          <a:p>
-            <a:pPr algn="l">
-              <a:spcAft>
-                <a:spcPts val="400"/>
-              </a:spcAft>
-            </a:pPr>
-            <a:r>
-              <a:rPr sz="850" b="1">
-                <a:solidFill>
-                  <a:srgbClr val="7A8599"/>
-                </a:solidFill>
-                <a:latin typeface="Segoe UI"/>
-              </a:rPr>
-              <a:t>CONNECTORS</a:t>
+            <a:off x="9134856" y="2578608"/>
+            <a:ext cx="2221992" cy="731520"/>
+          </a:xfrm>
+          <a:prstGeom prst="rect">
+            <a:avLst/>
+          </a:prstGeom>
+          <a:noFill/>
+        </p:spPr>
+        <p:txBody>
+          <a:bodyPr wrap="square">
+            <a:spAutoFit/>
+          </a:bodyPr>
+          <a:lstStyle/>
+          <a:p>
+            <a:pPr algn="l">
+              <a:spcAft>
+                <a:spcPts val="400"/>
+              </a:spcAft>
+            </a:pPr>
+            <a:r>
+              <a:rPr sz="950" b="0">
+                <a:solidFill>
+                  <a:srgbClr val="445066"/>
+                </a:solidFill>
+                <a:latin typeface="Segoe UI"/>
+              </a:rPr>
+              <a:t>FOCUS Reports in the Oracle-owned</a:t>
+            </a:r>
+          </a:p>
+          <a:p>
+            <a:pPr algn="l">
+              <a:spcAft>
+                <a:spcPts val="400"/>
+              </a:spcAft>
+            </a:pPr>
+            <a:r>
+              <a:rPr sz="950" b="0">
+                <a:solidFill>
+                  <a:srgbClr val="445066"/>
+                </a:solidFill>
+                <a:latin typeface="Segoe UI"/>
+              </a:rPr>
+              <a:t>'bling' bucket, gzipped CSV</a:t>
             </a:r>
           </a:p>
         </p:txBody>
@@ -17576,85 +17598,46 @@
         </p:nvSpPr>
         <p:spPr>
           <a:xfrm>
-            <a:off x="804672" y="5202936"/>
-            <a:ext cx="3227832" cy="457200"/>
-          </a:xfrm>
-          <a:prstGeom prst="rect">
-            <a:avLst/>
-          </a:prstGeom>
-          <a:noFill/>
-        </p:spPr>
-        <p:txBody>
-          <a:bodyPr wrap="square">
-            <a:spAutoFit/>
-          </a:bodyPr>
-          <a:lstStyle/>
-          <a:p>
-            <a:pPr algn="l">
-              <a:spcAft>
-                <a:spcPts val="400"/>
-              </a:spcAft>
-            </a:pPr>
-            <a:r>
-              <a:rPr sz="2100" b="1">
-                <a:solidFill>
-                  <a:srgbClr val="0B142A"/>
-                </a:solidFill>
-                <a:latin typeface="Segoe UI"/>
-              </a:rPr>
-              <a:t>17</a:t>
-            </a:r>
-          </a:p>
-        </p:txBody>
-      </p:sp>
-      <p:sp>
-        <p:nvSpPr>
-          <p:cNvPr id="23" name="TextBox 22"/>
-          <p:cNvSpPr txBox="1"/>
-          <p:nvPr/>
-        </p:nvSpPr>
-        <p:spPr>
-          <a:xfrm>
-            <a:off x="804672" y="5678424"/>
-            <a:ext cx="3227832" cy="365760"/>
-          </a:xfrm>
-          <a:prstGeom prst="rect">
-            <a:avLst/>
-          </a:prstGeom>
-          <a:noFill/>
-        </p:spPr>
-        <p:txBody>
-          <a:bodyPr wrap="square">
-            <a:spAutoFit/>
-          </a:bodyPr>
-          <a:lstStyle/>
-          <a:p>
-            <a:pPr algn="l">
-              <a:spcAft>
-                <a:spcPts val="400"/>
-              </a:spcAft>
-            </a:pPr>
-            <a:r>
-              <a:rPr sz="900" b="0">
-                <a:solidFill>
-                  <a:srgbClr val="7A8599"/>
-                </a:solidFill>
-                <a:latin typeface="Segoe UI"/>
-              </a:rPr>
-              <a:t>3 native + 12 procured tools + any FOCUS file</a:t>
-            </a:r>
-          </a:p>
-        </p:txBody>
-      </p:sp>
-      <p:sp>
-        <p:nvSpPr>
-          <p:cNvPr id="24" name="Rounded Rectangle 23"/>
+            <a:off x="640080" y="3657600"/>
+            <a:ext cx="10881360" cy="1280160"/>
+          </a:xfrm>
+          <a:prstGeom prst="rect">
+            <a:avLst/>
+          </a:prstGeom>
+          <a:noFill/>
+        </p:spPr>
+        <p:txBody>
+          <a:bodyPr wrap="square">
+            <a:spAutoFit/>
+          </a:bodyPr>
+          <a:lstStyle/>
+          <a:p>
+            <a:pPr algn="l">
+              <a:spcAft>
+                <a:spcPts val="400"/>
+              </a:spcAft>
+            </a:pPr>
+            <a:r>
+              <a:rPr sz="1300" b="0">
+                <a:solidFill>
+                  <a:srgbClr val="445066"/>
+                </a:solidFill>
+                <a:latin typeface="Segoe UI"/>
+              </a:rPr>
+              <a:t>All four providers emit FOCUS natively today. So do CloudZero and Vantage; Cloudability, CloudHealth and Flexera ingest it. That is why this platform is vendor-neutral by construction rather than by adapter: no dashboard, KPI formula, optimization detector or agent tool has ever seen a vendor-specific field.</a:t>
+            </a:r>
+          </a:p>
+        </p:txBody>
+      </p:sp>
+      <p:sp>
+        <p:nvSpPr>
+          <p:cNvPr id="23" name="Rounded Rectangle 22"/>
           <p:cNvSpPr/>
           <p:nvPr/>
         </p:nvSpPr>
         <p:spPr>
           <a:xfrm>
-            <a:off x="4315968" y="4892040"/>
+            <a:off x="640080" y="4892040"/>
             <a:ext cx="3502152" cy="1188720"/>
           </a:xfrm>
           <a:prstGeom prst="roundRect">
@@ -17694,20 +17677,20 @@
       </p:sp>
       <p:sp>
         <p:nvSpPr>
-          <p:cNvPr id="25" name="Rectangle 24"/>
+          <p:cNvPr id="24" name="Rectangle 23"/>
           <p:cNvSpPr/>
           <p:nvPr/>
         </p:nvSpPr>
         <p:spPr>
           <a:xfrm>
-            <a:off x="4315968" y="4892040"/>
+            <a:off x="640080" y="4892040"/>
             <a:ext cx="44450" cy="1188720"/>
           </a:xfrm>
           <a:prstGeom prst="rect">
             <a:avLst/>
           </a:prstGeom>
           <a:solidFill>
-            <a:srgbClr val="119B8A"/>
+            <a:srgbClr val="1E6FD9"/>
           </a:solidFill>
           <a:ln>
             <a:noFill/>
@@ -17738,131 +17721,131 @@
       </p:sp>
       <p:sp>
         <p:nvSpPr>
+          <p:cNvPr id="25" name="TextBox 24"/>
+          <p:cNvSpPr txBox="1"/>
+          <p:nvPr/>
+        </p:nvSpPr>
+        <p:spPr>
+          <a:xfrm>
+            <a:off x="804672" y="4965192"/>
+            <a:ext cx="3227832" cy="256032"/>
+          </a:xfrm>
+          <a:prstGeom prst="rect">
+            <a:avLst/>
+          </a:prstGeom>
+          <a:noFill/>
+        </p:spPr>
+        <p:txBody>
+          <a:bodyPr wrap="square">
+            <a:spAutoFit/>
+          </a:bodyPr>
+          <a:lstStyle/>
+          <a:p>
+            <a:pPr algn="l">
+              <a:spcAft>
+                <a:spcPts val="400"/>
+              </a:spcAft>
+            </a:pPr>
+            <a:r>
+              <a:rPr sz="850" b="1">
+                <a:solidFill>
+                  <a:srgbClr val="7A8599"/>
+                </a:solidFill>
+                <a:latin typeface="Segoe UI"/>
+              </a:rPr>
+              <a:t>CONNECTORS</a:t>
+            </a:r>
+          </a:p>
+        </p:txBody>
+      </p:sp>
+      <p:sp>
+        <p:nvSpPr>
           <p:cNvPr id="26" name="TextBox 25"/>
           <p:cNvSpPr txBox="1"/>
           <p:nvPr/>
         </p:nvSpPr>
         <p:spPr>
           <a:xfrm>
-            <a:off x="4480560" y="4965192"/>
-            <a:ext cx="3227832" cy="256032"/>
-          </a:xfrm>
-          <a:prstGeom prst="rect">
-            <a:avLst/>
-          </a:prstGeom>
-          <a:noFill/>
-        </p:spPr>
-        <p:txBody>
-          <a:bodyPr wrap="square">
-            <a:spAutoFit/>
-          </a:bodyPr>
-          <a:lstStyle/>
-          <a:p>
-            <a:pPr algn="l">
-              <a:spcAft>
-                <a:spcPts val="400"/>
-              </a:spcAft>
-            </a:pPr>
-            <a:r>
-              <a:rPr sz="850" b="1">
+            <a:off x="804672" y="5202936"/>
+            <a:ext cx="3227832" cy="457200"/>
+          </a:xfrm>
+          <a:prstGeom prst="rect">
+            <a:avLst/>
+          </a:prstGeom>
+          <a:noFill/>
+        </p:spPr>
+        <p:txBody>
+          <a:bodyPr wrap="square">
+            <a:spAutoFit/>
+          </a:bodyPr>
+          <a:lstStyle/>
+          <a:p>
+            <a:pPr algn="l">
+              <a:spcAft>
+                <a:spcPts val="400"/>
+              </a:spcAft>
+            </a:pPr>
+            <a:r>
+              <a:rPr sz="2100" b="1">
+                <a:solidFill>
+                  <a:srgbClr val="0B142A"/>
+                </a:solidFill>
+                <a:latin typeface="Segoe UI"/>
+              </a:rPr>
+              <a:t>18</a:t>
+            </a:r>
+          </a:p>
+        </p:txBody>
+      </p:sp>
+      <p:sp>
+        <p:nvSpPr>
+          <p:cNvPr id="27" name="TextBox 26"/>
+          <p:cNvSpPr txBox="1"/>
+          <p:nvPr/>
+        </p:nvSpPr>
+        <p:spPr>
+          <a:xfrm>
+            <a:off x="804672" y="5678424"/>
+            <a:ext cx="3227832" cy="365760"/>
+          </a:xfrm>
+          <a:prstGeom prst="rect">
+            <a:avLst/>
+          </a:prstGeom>
+          <a:noFill/>
+        </p:spPr>
+        <p:txBody>
+          <a:bodyPr wrap="square">
+            <a:spAutoFit/>
+          </a:bodyPr>
+          <a:lstStyle/>
+          <a:p>
+            <a:pPr algn="l">
+              <a:spcAft>
+                <a:spcPts val="400"/>
+              </a:spcAft>
+            </a:pPr>
+            <a:r>
+              <a:rPr sz="900" b="0">
                 <a:solidFill>
                   <a:srgbClr val="7A8599"/>
                 </a:solidFill>
                 <a:latin typeface="Segoe UI"/>
               </a:rPr>
-              <a:t>ADOPTING A NEW TOOL</a:t>
-            </a:r>
-          </a:p>
-        </p:txBody>
-      </p:sp>
-      <p:sp>
-        <p:nvSpPr>
-          <p:cNvPr id="27" name="TextBox 26"/>
-          <p:cNvSpPr txBox="1"/>
-          <p:nvPr/>
-        </p:nvSpPr>
-        <p:spPr>
-          <a:xfrm>
-            <a:off x="4480560" y="5202936"/>
-            <a:ext cx="3227832" cy="457200"/>
-          </a:xfrm>
-          <a:prstGeom prst="rect">
-            <a:avLst/>
-          </a:prstGeom>
-          <a:noFill/>
-        </p:spPr>
-        <p:txBody>
-          <a:bodyPr wrap="square">
-            <a:spAutoFit/>
-          </a:bodyPr>
-          <a:lstStyle/>
-          <a:p>
-            <a:pPr algn="l">
-              <a:spcAft>
-                <a:spcPts val="400"/>
-              </a:spcAft>
-            </a:pPr>
-            <a:r>
-              <a:rPr sz="2100" b="1">
-                <a:solidFill>
-                  <a:srgbClr val="0B142A"/>
-                </a:solidFill>
-                <a:latin typeface="Segoe UI"/>
-              </a:rPr>
-              <a:t>1 subclass</a:t>
-            </a:r>
-          </a:p>
-        </p:txBody>
-      </p:sp>
-      <p:sp>
-        <p:nvSpPr>
-          <p:cNvPr id="28" name="TextBox 27"/>
-          <p:cNvSpPr txBox="1"/>
-          <p:nvPr/>
-        </p:nvSpPr>
-        <p:spPr>
-          <a:xfrm>
-            <a:off x="4480560" y="5678424"/>
-            <a:ext cx="3227832" cy="365760"/>
-          </a:xfrm>
-          <a:prstGeom prst="rect">
-            <a:avLst/>
-          </a:prstGeom>
-          <a:noFill/>
-        </p:spPr>
-        <p:txBody>
-          <a:bodyPr wrap="square">
-            <a:spAutoFit/>
-          </a:bodyPr>
-          <a:lstStyle/>
-          <a:p>
-            <a:pPr algn="l">
-              <a:spcAft>
-                <a:spcPts val="400"/>
-              </a:spcAft>
-            </a:pPr>
-            <a:r>
-              <a:rPr sz="900" b="0">
-                <a:solidFill>
-                  <a:srgbClr val="7A8599"/>
-                </a:solidFill>
-                <a:latin typeface="Segoe UI"/>
-              </a:rPr>
-              <a:t>plus one line in the registry</a:t>
-            </a:r>
-          </a:p>
-        </p:txBody>
-      </p:sp>
-      <p:sp>
-        <p:nvSpPr>
-          <p:cNvPr id="29" name="Rounded Rectangle 28"/>
+              <a:t>3 native + 12 procured tools + any FOCUS file</a:t>
+            </a:r>
+          </a:p>
+        </p:txBody>
+      </p:sp>
+      <p:sp>
+        <p:nvSpPr>
+          <p:cNvPr id="28" name="Rounded Rectangle 27"/>
           <p:cNvSpPr/>
           <p:nvPr/>
         </p:nvSpPr>
         <p:spPr>
           <a:xfrm>
-            <a:off x="7991856" y="4892040"/>
-            <a:ext cx="3529584" cy="1188720"/>
+            <a:off x="4315968" y="4892040"/>
+            <a:ext cx="3502152" cy="1188720"/>
           </a:xfrm>
           <a:prstGeom prst="roundRect">
             <a:avLst>
@@ -17901,7 +17884,214 @@
       </p:sp>
       <p:sp>
         <p:nvSpPr>
-          <p:cNvPr id="30" name="Rectangle 29"/>
+          <p:cNvPr id="29" name="Rectangle 28"/>
+          <p:cNvSpPr/>
+          <p:nvPr/>
+        </p:nvSpPr>
+        <p:spPr>
+          <a:xfrm>
+            <a:off x="4315968" y="4892040"/>
+            <a:ext cx="44450" cy="1188720"/>
+          </a:xfrm>
+          <a:prstGeom prst="rect">
+            <a:avLst/>
+          </a:prstGeom>
+          <a:solidFill>
+            <a:srgbClr val="119B8A"/>
+          </a:solidFill>
+          <a:ln>
+            <a:noFill/>
+          </a:ln>
+          <a:effectLst/>
+        </p:spPr>
+        <p:style>
+          <a:lnRef idx="1">
+            <a:schemeClr val="accent1"/>
+          </a:lnRef>
+          <a:fillRef idx="3">
+            <a:schemeClr val="accent1"/>
+          </a:fillRef>
+          <a:effectRef idx="2">
+            <a:schemeClr val="accent1"/>
+          </a:effectRef>
+          <a:fontRef idx="minor">
+            <a:schemeClr val="lt1"/>
+          </a:fontRef>
+        </p:style>
+        <p:txBody>
+          <a:bodyPr rtlCol="0" anchor="ctr"/>
+          <a:lstStyle/>
+          <a:p>
+            <a:pPr algn="ctr"/>
+          </a:p>
+        </p:txBody>
+      </p:sp>
+      <p:sp>
+        <p:nvSpPr>
+          <p:cNvPr id="30" name="TextBox 29"/>
+          <p:cNvSpPr txBox="1"/>
+          <p:nvPr/>
+        </p:nvSpPr>
+        <p:spPr>
+          <a:xfrm>
+            <a:off x="4480560" y="4965192"/>
+            <a:ext cx="3227832" cy="256032"/>
+          </a:xfrm>
+          <a:prstGeom prst="rect">
+            <a:avLst/>
+          </a:prstGeom>
+          <a:noFill/>
+        </p:spPr>
+        <p:txBody>
+          <a:bodyPr wrap="square">
+            <a:spAutoFit/>
+          </a:bodyPr>
+          <a:lstStyle/>
+          <a:p>
+            <a:pPr algn="l">
+              <a:spcAft>
+                <a:spcPts val="400"/>
+              </a:spcAft>
+            </a:pPr>
+            <a:r>
+              <a:rPr sz="850" b="1">
+                <a:solidFill>
+                  <a:srgbClr val="7A8599"/>
+                </a:solidFill>
+                <a:latin typeface="Segoe UI"/>
+              </a:rPr>
+              <a:t>ADOPTING A NEW TOOL</a:t>
+            </a:r>
+          </a:p>
+        </p:txBody>
+      </p:sp>
+      <p:sp>
+        <p:nvSpPr>
+          <p:cNvPr id="31" name="TextBox 30"/>
+          <p:cNvSpPr txBox="1"/>
+          <p:nvPr/>
+        </p:nvSpPr>
+        <p:spPr>
+          <a:xfrm>
+            <a:off x="4480560" y="5202936"/>
+            <a:ext cx="3227832" cy="457200"/>
+          </a:xfrm>
+          <a:prstGeom prst="rect">
+            <a:avLst/>
+          </a:prstGeom>
+          <a:noFill/>
+        </p:spPr>
+        <p:txBody>
+          <a:bodyPr wrap="square">
+            <a:spAutoFit/>
+          </a:bodyPr>
+          <a:lstStyle/>
+          <a:p>
+            <a:pPr algn="l">
+              <a:spcAft>
+                <a:spcPts val="400"/>
+              </a:spcAft>
+            </a:pPr>
+            <a:r>
+              <a:rPr sz="2100" b="1">
+                <a:solidFill>
+                  <a:srgbClr val="0B142A"/>
+                </a:solidFill>
+                <a:latin typeface="Segoe UI"/>
+              </a:rPr>
+              <a:t>1 subclass</a:t>
+            </a:r>
+          </a:p>
+        </p:txBody>
+      </p:sp>
+      <p:sp>
+        <p:nvSpPr>
+          <p:cNvPr id="32" name="TextBox 31"/>
+          <p:cNvSpPr txBox="1"/>
+          <p:nvPr/>
+        </p:nvSpPr>
+        <p:spPr>
+          <a:xfrm>
+            <a:off x="4480560" y="5678424"/>
+            <a:ext cx="3227832" cy="365760"/>
+          </a:xfrm>
+          <a:prstGeom prst="rect">
+            <a:avLst/>
+          </a:prstGeom>
+          <a:noFill/>
+        </p:spPr>
+        <p:txBody>
+          <a:bodyPr wrap="square">
+            <a:spAutoFit/>
+          </a:bodyPr>
+          <a:lstStyle/>
+          <a:p>
+            <a:pPr algn="l">
+              <a:spcAft>
+                <a:spcPts val="400"/>
+              </a:spcAft>
+            </a:pPr>
+            <a:r>
+              <a:rPr sz="900" b="0">
+                <a:solidFill>
+                  <a:srgbClr val="7A8599"/>
+                </a:solidFill>
+                <a:latin typeface="Segoe UI"/>
+              </a:rPr>
+              <a:t>plus one line in the registry</a:t>
+            </a:r>
+          </a:p>
+        </p:txBody>
+      </p:sp>
+      <p:sp>
+        <p:nvSpPr>
+          <p:cNvPr id="33" name="Rounded Rectangle 32"/>
+          <p:cNvSpPr/>
+          <p:nvPr/>
+        </p:nvSpPr>
+        <p:spPr>
+          <a:xfrm>
+            <a:off x="7991856" y="4892040"/>
+            <a:ext cx="3529584" cy="1188720"/>
+          </a:xfrm>
+          <a:prstGeom prst="roundRect">
+            <a:avLst>
+              <a:gd name="adj" fmla="val 6000"/>
+            </a:avLst>
+          </a:prstGeom>
+          <a:solidFill>
+            <a:srgbClr val="FFFFFF"/>
+          </a:solidFill>
+          <a:ln w="12700">
+            <a:solidFill>
+              <a:srgbClr val="E2E7EF"/>
+            </a:solidFill>
+          </a:ln>
+          <a:effectLst/>
+        </p:spPr>
+        <p:style>
+          <a:lnRef idx="1">
+            <a:schemeClr val="accent1"/>
+          </a:lnRef>
+          <a:fillRef idx="3">
+            <a:schemeClr val="accent1"/>
+          </a:fillRef>
+          <a:effectRef idx="2">
+            <a:schemeClr val="accent1"/>
+          </a:effectRef>
+          <a:fontRef idx="minor">
+            <a:schemeClr val="lt1"/>
+          </a:fontRef>
+        </p:style>
+        <p:txBody>
+          <a:bodyPr rtlCol="0" anchor="ctr"/>
+          <a:lstStyle/>
+          <a:p/>
+        </p:txBody>
+      </p:sp>
+      <p:sp>
+        <p:nvSpPr>
+          <p:cNvPr id="34" name="Rectangle 33"/>
           <p:cNvSpPr/>
           <p:nvPr/>
         </p:nvSpPr>
@@ -17945,7 +18135,7 @@
       </p:sp>
       <p:sp>
         <p:nvSpPr>
-          <p:cNvPr id="31" name="TextBox 30"/>
+          <p:cNvPr id="35" name="TextBox 34"/>
           <p:cNvSpPr txBox="1"/>
           <p:nvPr/>
         </p:nvSpPr>
@@ -17984,7 +18174,7 @@
       </p:sp>
       <p:sp>
         <p:nvSpPr>
-          <p:cNvPr id="32" name="TextBox 31"/>
+          <p:cNvPr id="36" name="TextBox 35"/>
           <p:cNvSpPr txBox="1"/>
           <p:nvPr/>
         </p:nvSpPr>
@@ -18023,7 +18213,7 @@
       </p:sp>
       <p:sp>
         <p:nvSpPr>
-          <p:cNvPr id="33" name="TextBox 32"/>
+          <p:cNvPr id="37" name="TextBox 36"/>
           <p:cNvSpPr txBox="1"/>
           <p:nvPr/>
         </p:nvSpPr>
@@ -18062,7 +18252,7 @@
       </p:sp>
       <p:sp>
         <p:nvSpPr>
-          <p:cNvPr id="34" name="TextBox 33"/>
+          <p:cNvPr id="38" name="TextBox 37"/>
           <p:cNvSpPr txBox="1"/>
           <p:nvPr/>
         </p:nvSpPr>
@@ -18092,7 +18282,7 @@
       </p:sp>
       <p:sp>
         <p:nvSpPr>
-          <p:cNvPr id="35" name="TextBox 34"/>
+          <p:cNvPr id="39" name="TextBox 38"/>
           <p:cNvSpPr txBox="1"/>
           <p:nvPr/>
         </p:nvSpPr>
@@ -18609,7 +18799,7 @@
                 </a:solidFill>
                 <a:latin typeface="Segoe UI"/>
               </a:rPr>
-              <a:t>How AWS, Azure and Google Cloud each aggregate billing</a:t>
+              <a:t>How AWS, Azure, Google Cloud and OCI each aggregate billing</a:t>
             </a:r>
           </a:p>
         </p:txBody>
@@ -19555,7 +19745,7 @@
                 </a:solidFill>
                 <a:latin typeface="Segoe UI"/>
               </a:rPr>
-              <a:t>~55k rows demo; ~8 GB at 500k line-items/month</a:t>
+              <a:t>~63k rows demo; ~8 GB at 500k line-items/month</a:t>
             </a:r>
           </a:p>
         </p:txBody>
@@ -19989,7 +20179,7 @@
                 </a:solidFill>
                 <a:latin typeface="Segoe UI"/>
               </a:rPr>
-              <a:t>ADC on the service account — no API key exists</a:t>
+              <a:t>ADC on the service account — no model API key exists</a:t>
             </a:r>
           </a:p>
         </p:txBody>
@@ -21000,7 +21190,7 @@
                 </a:solidFill>
                 <a:latin typeface="Segoe UI"/>
               </a:rPr>
-              <a:t>54,870 rows</a:t>
+              <a:t>63,358 rows</a:t>
             </a:r>
           </a:p>
         </p:txBody>
@@ -24360,7 +24550,7 @@
                 </a:solidFill>
                 <a:latin typeface="Segoe UI"/>
               </a:rPr>
-              <a:t>For scale: the model bill is roughly 0.0092% of the $30.28M of cloud spend under management. The Copilot is not where a FinOps programme's money goes.</a:t>
+              <a:t>For scale: the model bill is roughly 0.0085% of the $32.65M of cloud spend under management. The Copilot is not where a FinOps programme's money goes.</a:t>
             </a:r>
           </a:p>
         </p:txBody>
